--- a/CV1711-WEEK8.pptx
+++ b/CV1711-WEEK8.pptx
@@ -135,7 +135,7 @@
 <file path=ppt/revisionInfo.xml><?xml version="1.0" encoding="utf-8"?>
 <p1510:revInfo xmlns:a="http://schemas.openxmlformats.org/drawingml/2006/main" xmlns:r="http://schemas.openxmlformats.org/officeDocument/2006/relationships" xmlns:p1510="http://schemas.microsoft.com/office/powerpoint/2015/10/main">
   <p1510:revLst>
-    <p1510:client id="{648D5070-02AD-4242-83D7-C82875EA45BB}" v="39" dt="2026-03-10T12:40:27.103"/>
+    <p1510:client id="{648D5070-02AD-4242-83D7-C82875EA45BB}" v="41" dt="2026-03-10T12:43:41.198"/>
   </p1510:revLst>
 </p1510:revInfo>
 </file>
@@ -145,7 +145,7 @@
   <pc:docChgLst>
     <pc:chgData name="#CUI SHUAIWEN#" userId="35a196ea-bcb8-475e-86cf-0b9eaca8a48f" providerId="ADAL" clId="{4D8D382B-DDFF-455F-B5ED-E854E938891F}"/>
     <pc:docChg chg="undo custSel addSld delSld modSld sldOrd">
-      <pc:chgData name="#CUI SHUAIWEN#" userId="35a196ea-bcb8-475e-86cf-0b9eaca8a48f" providerId="ADAL" clId="{4D8D382B-DDFF-455F-B5ED-E854E938891F}" dt="2026-03-10T12:40:27.103" v="835"/>
+      <pc:chgData name="#CUI SHUAIWEN#" userId="35a196ea-bcb8-475e-86cf-0b9eaca8a48f" providerId="ADAL" clId="{4D8D382B-DDFF-455F-B5ED-E854E938891F}" dt="2026-03-10T12:43:57.452" v="853" actId="1076"/>
       <pc:docMkLst>
         <pc:docMk/>
       </pc:docMkLst>
@@ -197,21 +197,29 @@
         </pc:spChg>
       </pc:sldChg>
       <pc:sldChg chg="addSp delSp modSp add mod">
-        <pc:chgData name="#CUI SHUAIWEN#" userId="35a196ea-bcb8-475e-86cf-0b9eaca8a48f" providerId="ADAL" clId="{4D8D382B-DDFF-455F-B5ED-E854E938891F}" dt="2026-02-13T07:40:36.439" v="308" actId="1076"/>
+        <pc:chgData name="#CUI SHUAIWEN#" userId="35a196ea-bcb8-475e-86cf-0b9eaca8a48f" providerId="ADAL" clId="{4D8D382B-DDFF-455F-B5ED-E854E938891F}" dt="2026-03-10T12:43:57.452" v="853" actId="1076"/>
         <pc:sldMkLst>
           <pc:docMk/>
           <pc:sldMk cId="2224933946" sldId="304"/>
         </pc:sldMkLst>
         <pc:spChg chg="mod">
-          <ac:chgData name="#CUI SHUAIWEN#" userId="35a196ea-bcb8-475e-86cf-0b9eaca8a48f" providerId="ADAL" clId="{4D8D382B-DDFF-455F-B5ED-E854E938891F}" dt="2026-02-13T07:40:34.269" v="307" actId="1076"/>
+          <ac:chgData name="#CUI SHUAIWEN#" userId="35a196ea-bcb8-475e-86cf-0b9eaca8a48f" providerId="ADAL" clId="{4D8D382B-DDFF-455F-B5ED-E854E938891F}" dt="2026-03-10T12:43:27.126" v="842" actId="1076"/>
+          <ac:spMkLst>
+            <pc:docMk/>
+            <pc:sldMk cId="2224933946" sldId="304"/>
+            <ac:spMk id="10" creationId="{60DDE0AD-E736-7834-9770-6052B3973F69}"/>
+          </ac:spMkLst>
+        </pc:spChg>
+        <pc:spChg chg="mod">
+          <ac:chgData name="#CUI SHUAIWEN#" userId="35a196ea-bcb8-475e-86cf-0b9eaca8a48f" providerId="ADAL" clId="{4D8D382B-DDFF-455F-B5ED-E854E938891F}" dt="2026-03-10T12:43:55.240" v="852" actId="1076"/>
           <ac:spMkLst>
             <pc:docMk/>
             <pc:sldMk cId="2224933946" sldId="304"/>
             <ac:spMk id="11" creationId="{1F4BC619-0BB6-4377-DAFE-60564F8DE541}"/>
           </ac:spMkLst>
         </pc:spChg>
-        <pc:picChg chg="add mod ord">
-          <ac:chgData name="#CUI SHUAIWEN#" userId="35a196ea-bcb8-475e-86cf-0b9eaca8a48f" providerId="ADAL" clId="{4D8D382B-DDFF-455F-B5ED-E854E938891F}" dt="2026-02-13T07:40:13.225" v="300" actId="1076"/>
+        <pc:picChg chg="add del mod ord">
+          <ac:chgData name="#CUI SHUAIWEN#" userId="35a196ea-bcb8-475e-86cf-0b9eaca8a48f" providerId="ADAL" clId="{4D8D382B-DDFF-455F-B5ED-E854E938891F}" dt="2026-03-10T12:43:14.248" v="836" actId="478"/>
           <ac:picMkLst>
             <pc:docMk/>
             <pc:sldMk cId="2224933946" sldId="304"/>
@@ -219,15 +227,39 @@
           </ac:picMkLst>
         </pc:picChg>
         <pc:picChg chg="add mod ord">
-          <ac:chgData name="#CUI SHUAIWEN#" userId="35a196ea-bcb8-475e-86cf-0b9eaca8a48f" providerId="ADAL" clId="{4D8D382B-DDFF-455F-B5ED-E854E938891F}" dt="2026-02-13T07:40:31.644" v="306" actId="14100"/>
+          <ac:chgData name="#CUI SHUAIWEN#" userId="35a196ea-bcb8-475e-86cf-0b9eaca8a48f" providerId="ADAL" clId="{4D8D382B-DDFF-455F-B5ED-E854E938891F}" dt="2026-03-10T12:43:24.492" v="841" actId="14100"/>
+          <ac:picMkLst>
+            <pc:docMk/>
+            <pc:sldMk cId="2224933946" sldId="304"/>
+            <ac:picMk id="5" creationId="{F36B151F-D300-1C62-7C9F-0B98C7FB0183}"/>
+          </ac:picMkLst>
+        </pc:picChg>
+        <pc:picChg chg="add del mod ord">
+          <ac:chgData name="#CUI SHUAIWEN#" userId="35a196ea-bcb8-475e-86cf-0b9eaca8a48f" providerId="ADAL" clId="{4D8D382B-DDFF-455F-B5ED-E854E938891F}" dt="2026-03-10T12:43:36.010" v="844" actId="478"/>
           <ac:picMkLst>
             <pc:docMk/>
             <pc:sldMk cId="2224933946" sldId="304"/>
             <ac:picMk id="8" creationId="{6E905F45-6EB8-6ED1-B7FC-8266293A3D49}"/>
           </ac:picMkLst>
         </pc:picChg>
+        <pc:picChg chg="add mod ord">
+          <ac:chgData name="#CUI SHUAIWEN#" userId="35a196ea-bcb8-475e-86cf-0b9eaca8a48f" providerId="ADAL" clId="{4D8D382B-DDFF-455F-B5ED-E854E938891F}" dt="2026-03-10T12:43:52.107" v="851" actId="14100"/>
+          <ac:picMkLst>
+            <pc:docMk/>
+            <pc:sldMk cId="2224933946" sldId="304"/>
+            <ac:picMk id="9" creationId="{61D65DAE-7EFF-1C13-A85F-6D64B4FB18E8}"/>
+          </ac:picMkLst>
+        </pc:picChg>
         <pc:cxnChg chg="mod">
-          <ac:chgData name="#CUI SHUAIWEN#" userId="35a196ea-bcb8-475e-86cf-0b9eaca8a48f" providerId="ADAL" clId="{4D8D382B-DDFF-455F-B5ED-E854E938891F}" dt="2026-02-13T07:40:36.439" v="308" actId="1076"/>
+          <ac:chgData name="#CUI SHUAIWEN#" userId="35a196ea-bcb8-475e-86cf-0b9eaca8a48f" providerId="ADAL" clId="{4D8D382B-DDFF-455F-B5ED-E854E938891F}" dt="2026-03-10T12:43:29.121" v="843" actId="1076"/>
+          <ac:cxnSpMkLst>
+            <pc:docMk/>
+            <pc:sldMk cId="2224933946" sldId="304"/>
+            <ac:cxnSpMk id="13" creationId="{384C5E3C-55BB-FCF1-AD31-DE3A0295D844}"/>
+          </ac:cxnSpMkLst>
+        </pc:cxnChg>
+        <pc:cxnChg chg="mod">
+          <ac:chgData name="#CUI SHUAIWEN#" userId="35a196ea-bcb8-475e-86cf-0b9eaca8a48f" providerId="ADAL" clId="{4D8D382B-DDFF-455F-B5ED-E854E938891F}" dt="2026-03-10T12:43:57.452" v="853" actId="1076"/>
           <ac:cxnSpMkLst>
             <pc:docMk/>
             <pc:sldMk cId="2224933946" sldId="304"/>
@@ -6203,10 +6235,10 @@
       </p:grpSpPr>
       <p:pic>
         <p:nvPicPr>
-          <p:cNvPr id="8" name="Picture 7">
+          <p:cNvPr id="9" name="Picture 8">
             <a:extLst>
               <a:ext uri="{FF2B5EF4-FFF2-40B4-BE49-F238E27FC236}">
-                <a16:creationId xmlns:a16="http://schemas.microsoft.com/office/drawing/2014/main" id="{6E905F45-6EB8-6ED1-B7FC-8266293A3D49}"/>
+                <a16:creationId xmlns:a16="http://schemas.microsoft.com/office/drawing/2014/main" id="{61D65DAE-7EFF-1C13-A85F-6D64B4FB18E8}"/>
               </a:ext>
             </a:extLst>
           </p:cNvPr>
@@ -6223,8 +6255,8 @@
         </p:blipFill>
         <p:spPr>
           <a:xfrm>
-            <a:off x="6127889" y="344696"/>
-            <a:ext cx="2094929" cy="4554646"/>
+            <a:off x="6153972" y="489900"/>
+            <a:ext cx="1972266" cy="4287960"/>
           </a:xfrm>
           <a:prstGeom prst="rect">
             <a:avLst/>
@@ -6233,10 +6265,10 @@
       </p:pic>
       <p:pic>
         <p:nvPicPr>
-          <p:cNvPr id="3" name="Picture 2">
+          <p:cNvPr id="5" name="Picture 4">
             <a:extLst>
               <a:ext uri="{FF2B5EF4-FFF2-40B4-BE49-F238E27FC236}">
-                <a16:creationId xmlns:a16="http://schemas.microsoft.com/office/drawing/2014/main" id="{BD1F1D94-BF01-9773-824C-FE402E312B92}"/>
+                <a16:creationId xmlns:a16="http://schemas.microsoft.com/office/drawing/2014/main" id="{F36B151F-D300-1C62-7C9F-0B98C7FB0183}"/>
               </a:ext>
             </a:extLst>
           </p:cNvPr>
@@ -6253,8 +6285,8 @@
         </p:blipFill>
         <p:spPr>
           <a:xfrm>
-            <a:off x="3524535" y="344695"/>
-            <a:ext cx="2094929" cy="4554646"/>
+            <a:off x="3501778" y="489900"/>
+            <a:ext cx="1972265" cy="4287960"/>
           </a:xfrm>
           <a:prstGeom prst="rect">
             <a:avLst/>
@@ -6341,7 +6373,7 @@
         </p:nvSpPr>
         <p:spPr>
           <a:xfrm>
-            <a:off x="3649133" y="3606800"/>
+            <a:off x="3649133" y="4086496"/>
             <a:ext cx="1032701" cy="211667"/>
           </a:xfrm>
           <a:prstGeom prst="roundRect">
@@ -6391,7 +6423,7 @@
         </p:nvSpPr>
         <p:spPr>
           <a:xfrm>
-            <a:off x="6832600" y="2219217"/>
+            <a:off x="6765576" y="3409271"/>
             <a:ext cx="1032701" cy="211667"/>
           </a:xfrm>
           <a:prstGeom prst="roundRect">
@@ -6441,7 +6473,7 @@
         </p:nvCxnSpPr>
         <p:spPr>
           <a:xfrm flipH="1">
-            <a:off x="4681834" y="3268133"/>
+            <a:off x="4681834" y="3717108"/>
             <a:ext cx="355833" cy="338667"/>
           </a:xfrm>
           <a:prstGeom prst="straightConnector1">
@@ -6483,7 +6515,7 @@
         </p:nvCxnSpPr>
         <p:spPr>
           <a:xfrm flipH="1">
-            <a:off x="7762850" y="1913682"/>
+            <a:off x="7756469" y="3070604"/>
             <a:ext cx="355833" cy="338667"/>
           </a:xfrm>
           <a:prstGeom prst="straightConnector1">
@@ -7174,6 +7206,15 @@
 </file>
 
 <file path=customXml/item2.xml><?xml version="1.0" encoding="utf-8"?>
+<?mso-contentType ?>
+<FormTemplates xmlns="http://schemas.microsoft.com/sharepoint/v3/contenttype/forms">
+  <Display>DocumentLibraryForm</Display>
+  <Edit>DocumentLibraryForm</Edit>
+  <New>DocumentLibraryForm</New>
+</FormTemplates>
+</file>
+
+<file path=customXml/item3.xml><?xml version="1.0" encoding="utf-8"?>
 <ct:contentTypeSchema xmlns:ct="http://schemas.microsoft.com/office/2006/metadata/contentType" xmlns:ma="http://schemas.microsoft.com/office/2006/metadata/properties/metaAttributes" ct:_="" ma:_="" ma:contentTypeName="Document" ma:contentTypeID="0x010100E28E816AC679FF4C86C22834E825BD05" ma:contentTypeVersion="1" ma:contentTypeDescription="Create a new document." ma:contentTypeScope="" ma:versionID="066e42d507d75a122d0db91dd470f30a">
   <xsd:schema xmlns:xsd="http://www.w3.org/2001/XMLSchema" xmlns:xs="http://www.w3.org/2001/XMLSchema" xmlns:p="http://schemas.microsoft.com/office/2006/metadata/properties" xmlns:ns1="http://schemas.microsoft.com/sharepoint/v3" targetNamespace="http://schemas.microsoft.com/office/2006/metadata/properties" ma:root="true" ma:fieldsID="48c5b5cd9b8d25ff6dd15848836f4270" ns1:_="">
     <xsd:import namespace="http://schemas.microsoft.com/sharepoint/v3"/>
@@ -7305,15 +7346,6 @@
 </ct:contentTypeSchema>
 </file>
 
-<file path=customXml/item3.xml><?xml version="1.0" encoding="utf-8"?>
-<?mso-contentType ?>
-<FormTemplates xmlns="http://schemas.microsoft.com/sharepoint/v3/contenttype/forms">
-  <Display>DocumentLibraryForm</Display>
-  <Edit>DocumentLibraryForm</Edit>
-  <New>DocumentLibraryForm</New>
-</FormTemplates>
-</file>
-
 <file path=customXml/itemProps1.xml><?xml version="1.0" encoding="utf-8"?>
 <ds:datastoreItem xmlns:ds="http://schemas.openxmlformats.org/officeDocument/2006/customXml" ds:itemID="{264D3FE7-A0C8-4453-A806-BCAD6F53B901}">
   <ds:schemaRefs>
@@ -7325,6 +7357,14 @@
 </file>
 
 <file path=customXml/itemProps2.xml><?xml version="1.0" encoding="utf-8"?>
+<ds:datastoreItem xmlns:ds="http://schemas.openxmlformats.org/officeDocument/2006/customXml" ds:itemID="{6CCB8030-6F99-446F-BD3B-E5E3F435F1FD}">
+  <ds:schemaRefs>
+    <ds:schemaRef ds:uri="http://schemas.microsoft.com/sharepoint/v3/contenttype/forms"/>
+  </ds:schemaRefs>
+</ds:datastoreItem>
+</file>
+
+<file path=customXml/itemProps3.xml><?xml version="1.0" encoding="utf-8"?>
 <ds:datastoreItem xmlns:ds="http://schemas.openxmlformats.org/officeDocument/2006/customXml" ds:itemID="{AFA540F8-4ACB-4DC8-920F-A3CE5A42B988}">
   <ds:schemaRefs>
     <ds:schemaRef ds:uri="http://schemas.microsoft.com/office/2006/metadata/contentType"/>
@@ -7342,14 +7382,6 @@
 </ds:datastoreItem>
 </file>
 
-<file path=customXml/itemProps3.xml><?xml version="1.0" encoding="utf-8"?>
-<ds:datastoreItem xmlns:ds="http://schemas.openxmlformats.org/officeDocument/2006/customXml" ds:itemID="{6CCB8030-6F99-446F-BD3B-E5E3F435F1FD}">
-  <ds:schemaRefs>
-    <ds:schemaRef ds:uri="http://schemas.microsoft.com/sharepoint/v3/contenttype/forms"/>
-  </ds:schemaRefs>
-</ds:datastoreItem>
-</file>
-
 <file path=docMetadata/LabelInfo.xml><?xml version="1.0" encoding="utf-8"?>
 <clbl:labelList xmlns:clbl="http://schemas.microsoft.com/office/2020/mipLabelMetadata">
   <clbl:label id="{15ce9348-be2a-462b-8fc0-e1765a9b204a}" enabled="0" method="" siteId="{15ce9348-be2a-462b-8fc0-e1765a9b204a}" removed="1"/>
